--- a/FAST/FAST Semester 2/DLD/SPEEDOMETER.pptx
+++ b/FAST/FAST Semester 2/DLD/SPEEDOMETER.pptx
@@ -2922,7 +2922,7 @@
           <a:p>
             <a:fld id="{AF869721-F543-4A6C-BF9D-65D7CC540427}" type="datetimeFigureOut">
               <a:rPr lang="en-US" smtClean="0"/>
-              <a:t>6/2/2022</a:t>
+              <a:t>6/1/2022</a:t>
             </a:fld>
             <a:endParaRPr lang="en-US" dirty="0"/>
           </a:p>
@@ -3099,7 +3099,7 @@
           <a:p>
             <a:fld id="{C732326A-4C88-4AFB-AA5B-5919D81DFF5B}" type="datetimeFigureOut">
               <a:rPr lang="en-US" smtClean="0"/>
-              <a:t>6/2/2022</a:t>
+              <a:t>6/1/2022</a:t>
             </a:fld>
             <a:endParaRPr lang="en-US" dirty="0"/>
           </a:p>
@@ -3864,7 +3864,7 @@
             <a:fld id="{B61BEF0D-F0BB-DE4B-95CE-6DB70DBA9567}" type="datetimeFigureOut">
               <a:rPr lang="en-US" smtClean="0"/>
               <a:pPr/>
-              <a:t>6/2/2022</a:t>
+              <a:t>6/1/2022</a:t>
             </a:fld>
             <a:endParaRPr lang="en-US" dirty="0"/>
           </a:p>
@@ -4128,7 +4128,7 @@
             <a:fld id="{B61BEF0D-F0BB-DE4B-95CE-6DB70DBA9567}" type="datetimeFigureOut">
               <a:rPr lang="en-US" smtClean="0"/>
               <a:pPr/>
-              <a:t>6/2/2022</a:t>
+              <a:t>6/1/2022</a:t>
             </a:fld>
             <a:endParaRPr lang="en-US" dirty="0"/>
           </a:p>
@@ -4365,7 +4365,7 @@
             <a:fld id="{B61BEF0D-F0BB-DE4B-95CE-6DB70DBA9567}" type="datetimeFigureOut">
               <a:rPr lang="en-US" smtClean="0"/>
               <a:pPr/>
-              <a:t>6/2/2022</a:t>
+              <a:t>6/1/2022</a:t>
             </a:fld>
             <a:endParaRPr lang="en-US" dirty="0"/>
           </a:p>
@@ -4607,7 +4607,7 @@
             <a:fld id="{B61BEF0D-F0BB-DE4B-95CE-6DB70DBA9567}" type="datetimeFigureOut">
               <a:rPr lang="en-US" smtClean="0"/>
               <a:pPr/>
-              <a:t>6/2/2022</a:t>
+              <a:t>6/1/2022</a:t>
             </a:fld>
             <a:endParaRPr lang="en-US" dirty="0"/>
           </a:p>
@@ -4916,7 +4916,7 @@
             <a:fld id="{B61BEF0D-F0BB-DE4B-95CE-6DB70DBA9567}" type="datetimeFigureOut">
               <a:rPr lang="en-US" smtClean="0"/>
               <a:pPr/>
-              <a:t>6/2/2022</a:t>
+              <a:t>6/1/2022</a:t>
             </a:fld>
             <a:endParaRPr lang="en-US" dirty="0"/>
           </a:p>
@@ -5220,7 +5220,7 @@
             <a:fld id="{B61BEF0D-F0BB-DE4B-95CE-6DB70DBA9567}" type="datetimeFigureOut">
               <a:rPr lang="en-US" smtClean="0"/>
               <a:pPr/>
-              <a:t>6/2/2022</a:t>
+              <a:t>6/1/2022</a:t>
             </a:fld>
             <a:endParaRPr lang="en-US" dirty="0"/>
           </a:p>
@@ -5644,7 +5644,7 @@
             <a:fld id="{B61BEF0D-F0BB-DE4B-95CE-6DB70DBA9567}" type="datetimeFigureOut">
               <a:rPr lang="en-US" smtClean="0"/>
               <a:pPr/>
-              <a:t>6/2/2022</a:t>
+              <a:t>6/1/2022</a:t>
             </a:fld>
             <a:endParaRPr lang="en-US" dirty="0"/>
           </a:p>
@@ -5741,7 +5741,7 @@
             <a:fld id="{B61BEF0D-F0BB-DE4B-95CE-6DB70DBA9567}" type="datetimeFigureOut">
               <a:rPr lang="en-US" smtClean="0"/>
               <a:pPr/>
-              <a:t>6/2/2022</a:t>
+              <a:t>6/1/2022</a:t>
             </a:fld>
             <a:endParaRPr lang="en-US" dirty="0"/>
           </a:p>
@@ -5905,7 +5905,7 @@
             <a:fld id="{B61BEF0D-F0BB-DE4B-95CE-6DB70DBA9567}" type="datetimeFigureOut">
               <a:rPr lang="en-US" smtClean="0"/>
               <a:pPr/>
-              <a:t>6/2/2022</a:t>
+              <a:t>6/1/2022</a:t>
             </a:fld>
             <a:endParaRPr lang="en-US" dirty="0"/>
           </a:p>
@@ -6285,7 +6285,7 @@
             <a:fld id="{B61BEF0D-F0BB-DE4B-95CE-6DB70DBA9567}" type="datetimeFigureOut">
               <a:rPr lang="en-US" smtClean="0"/>
               <a:pPr/>
-              <a:t>6/2/2022</a:t>
+              <a:t>6/1/2022</a:t>
             </a:fld>
             <a:endParaRPr lang="en-US" dirty="0"/>
           </a:p>
@@ -6576,7 +6576,7 @@
             <a:fld id="{B61BEF0D-F0BB-DE4B-95CE-6DB70DBA9567}" type="datetimeFigureOut">
               <a:rPr lang="en-US" smtClean="0"/>
               <a:pPr/>
-              <a:t>6/2/2022</a:t>
+              <a:t>6/1/2022</a:t>
             </a:fld>
             <a:endParaRPr lang="en-US" dirty="0"/>
           </a:p>
@@ -6789,7 +6789,7 @@
             <a:fld id="{B61BEF0D-F0BB-DE4B-95CE-6DB70DBA9567}" type="datetimeFigureOut">
               <a:rPr lang="en-US" smtClean="0"/>
               <a:pPr/>
-              <a:t>6/2/2022</a:t>
+              <a:t>6/1/2022</a:t>
             </a:fld>
             <a:endParaRPr lang="en-US" dirty="0"/>
           </a:p>
@@ -9147,7 +9147,7 @@
         </p:nvSpPr>
         <p:spPr>
           <a:xfrm>
-            <a:off x="8448574" y="2141313"/>
+            <a:off x="8296275" y="1419226"/>
             <a:ext cx="3081576" cy="1746762"/>
           </a:xfrm>
         </p:spPr>
@@ -9165,6 +9165,60 @@
               </a:rPr>
               <a:t>Thank You</a:t>
             </a:r>
+          </a:p>
+        </p:txBody>
+      </p:sp>
+      <p:sp>
+        <p:nvSpPr>
+          <p:cNvPr id="3" name="Subtitle 2">
+            <a:extLst>
+              <a:ext uri="{FF2B5EF4-FFF2-40B4-BE49-F238E27FC236}">
+                <a16:creationId xmlns:a16="http://schemas.microsoft.com/office/drawing/2014/main" id="{A9CB511D-EA45-4336-847C-1252667143B5}"/>
+              </a:ext>
+            </a:extLst>
+          </p:cNvPr>
+          <p:cNvSpPr>
+            <a:spLocks noGrp="1"/>
+          </p:cNvSpPr>
+          <p:nvPr>
+            <p:ph type="subTitle" idx="1"/>
+          </p:nvPr>
+        </p:nvSpPr>
+        <p:spPr>
+          <a:xfrm>
+            <a:off x="8296275" y="3505095"/>
+            <a:ext cx="3081576" cy="2629006"/>
+          </a:xfrm>
+        </p:spPr>
+        <p:txBody>
+          <a:bodyPr>
+            <a:normAutofit/>
+          </a:bodyPr>
+          <a:lstStyle/>
+          <a:p>
+            <a:pPr algn="ctr"/>
+            <a:r>
+              <a:rPr lang="en-US" sz="3600" dirty="0">
+                <a:solidFill>
+                  <a:schemeClr val="bg2"/>
+                </a:solidFill>
+              </a:rPr>
+              <a:t>ARE  THERE ANY QUESTIONS?</a:t>
+            </a:r>
+          </a:p>
+          <a:p>
+            <a:endParaRPr lang="en-US" dirty="0">
+              <a:solidFill>
+                <a:schemeClr val="bg2"/>
+              </a:solidFill>
+            </a:endParaRPr>
+          </a:p>
+          <a:p>
+            <a:endParaRPr lang="en-US" dirty="0">
+              <a:solidFill>
+                <a:schemeClr val="bg2"/>
+              </a:solidFill>
+            </a:endParaRPr>
           </a:p>
         </p:txBody>
       </p:sp>
